--- a/_memo/100knocks.pptx
+++ b/_memo/100knocks.pptx
@@ -5,13 +5,16 @@
     <p:sldMasterId id="2147483648" r:id="rId1"/>
   </p:sldMasterIdLst>
   <p:notesMasterIdLst>
-    <p:notesMasterId r:id="rId3"/>
+    <p:notesMasterId r:id="rId6"/>
   </p:notesMasterIdLst>
   <p:handoutMasterIdLst>
-    <p:handoutMasterId r:id="rId4"/>
+    <p:handoutMasterId r:id="rId7"/>
   </p:handoutMasterIdLst>
   <p:sldIdLst>
     <p:sldId id="633" r:id="rId2"/>
+    <p:sldId id="636" r:id="rId3"/>
+    <p:sldId id="635" r:id="rId4"/>
+    <p:sldId id="634" r:id="rId5"/>
   </p:sldIdLst>
   <p:sldSz cx="12192000" cy="6858000"/>
   <p:notesSz cx="6735763" cy="9866313"/>
@@ -116,6 +119,9 @@
         <p14:section name="セクションTop" id="{61C9A6AD-B2A0-DB44-929E-77AA199C7564}">
           <p14:sldIdLst>
             <p14:sldId id="633"/>
+            <p14:sldId id="636"/>
+            <p14:sldId id="635"/>
+            <p14:sldId id="634"/>
           </p14:sldIdLst>
         </p14:section>
         <p14:section name="アイコン" id="{E6A61129-24E8-BE4F-97F7-218E9035C89D}">
@@ -240,7 +246,7 @@
           </a:lstStyle>
           <a:p>
             <a:fld id="{F4EC1F04-A1CF-A64F-8670-D4A663991F5F}" type="datetimeFigureOut">
-              <a:t>2025/1/7</a:t>
+              <a:t>2025/3/2</a:t>
             </a:fld>
             <a:endParaRPr kumimoji="1" lang="ja-JP" altLang="en-US"/>
           </a:p>
@@ -416,7 +422,7 @@
           <a:p>
             <a:fld id="{CCF4AC06-B0E3-4F8D-B03B-27FBE5868222}" type="datetimeFigureOut">
               <a:rPr kumimoji="1" lang="ja-JP" altLang="en-US" smtClean="0"/>
-              <a:t>2025/1/7</a:t>
+              <a:t>2025/3/2</a:t>
             </a:fld>
             <a:endParaRPr kumimoji="1" lang="ja-JP" altLang="en-US"/>
           </a:p>
@@ -3461,7 +3467,7 @@
           </a:ln>
           <a:extLst>
             <a:ext uri="{C572A759-6A51-4108-AA02-DFA0A04FC94B}">
-              <ma14:wrappingTextBoxFlag xmlns="" xmlns:ma14="http://schemas.microsoft.com/office/mac/drawingml/2011/main" val="1"/>
+              <ma14:wrappingTextBoxFlag xmlns:ma14="http://schemas.microsoft.com/office/mac/drawingml/2011/main" xmlns="" val="1"/>
             </a:ext>
           </a:extLst>
         </p:spPr>
@@ -3713,7 +3719,7 @@
           </a:ln>
           <a:extLst>
             <a:ext uri="{C572A759-6A51-4108-AA02-DFA0A04FC94B}">
-              <ma14:wrappingTextBoxFlag xmlns="" xmlns:ma14="http://schemas.microsoft.com/office/mac/drawingml/2011/main" val="1"/>
+              <ma14:wrappingTextBoxFlag xmlns:ma14="http://schemas.microsoft.com/office/mac/drawingml/2011/main" xmlns="" val="1"/>
             </a:ext>
           </a:extLst>
         </p:spPr>
@@ -3950,7 +3956,7 @@
             </a:ln>
             <a:extLst>
               <a:ext uri="{C572A759-6A51-4108-AA02-DFA0A04FC94B}">
-                <ma14:wrappingTextBoxFlag xmlns="" xmlns:ma14="http://schemas.microsoft.com/office/mac/drawingml/2011/main" val="1"/>
+                <ma14:wrappingTextBoxFlag xmlns:ma14="http://schemas.microsoft.com/office/mac/drawingml/2011/main" xmlns="" val="1"/>
               </a:ext>
             </a:extLst>
           </p:spPr>
@@ -4020,7 +4026,7 @@
             </a:ln>
             <a:extLst>
               <a:ext uri="{C572A759-6A51-4108-AA02-DFA0A04FC94B}">
-                <ma14:wrappingTextBoxFlag xmlns="" xmlns:ma14="http://schemas.microsoft.com/office/mac/drawingml/2011/main" val="1"/>
+                <ma14:wrappingTextBoxFlag xmlns:ma14="http://schemas.microsoft.com/office/mac/drawingml/2011/main" xmlns="" val="1"/>
               </a:ext>
             </a:extLst>
           </p:spPr>
@@ -4090,7 +4096,7 @@
             </a:ln>
             <a:extLst>
               <a:ext uri="{C572A759-6A51-4108-AA02-DFA0A04FC94B}">
-                <ma14:wrappingTextBoxFlag xmlns="" xmlns:ma14="http://schemas.microsoft.com/office/mac/drawingml/2011/main" val="1"/>
+                <ma14:wrappingTextBoxFlag xmlns:ma14="http://schemas.microsoft.com/office/mac/drawingml/2011/main" xmlns="" val="1"/>
               </a:ext>
             </a:extLst>
           </p:spPr>
@@ -4357,7 +4363,7 @@
           </a:ln>
           <a:extLst>
             <a:ext uri="{C572A759-6A51-4108-AA02-DFA0A04FC94B}">
-              <ma14:wrappingTextBoxFlag xmlns="" xmlns:ma14="http://schemas.microsoft.com/office/mac/drawingml/2011/main" val="1"/>
+              <ma14:wrappingTextBoxFlag xmlns:ma14="http://schemas.microsoft.com/office/mac/drawingml/2011/main" xmlns="" val="1"/>
             </a:ext>
           </a:extLst>
         </p:spPr>
@@ -4609,7 +4615,7 @@
           </a:ln>
           <a:extLst>
             <a:ext uri="{C572A759-6A51-4108-AA02-DFA0A04FC94B}">
-              <ma14:wrappingTextBoxFlag xmlns="" xmlns:ma14="http://schemas.microsoft.com/office/mac/drawingml/2011/main" val="1"/>
+              <ma14:wrappingTextBoxFlag xmlns:ma14="http://schemas.microsoft.com/office/mac/drawingml/2011/main" xmlns="" val="1"/>
             </a:ext>
           </a:extLst>
         </p:spPr>
@@ -4826,7 +4832,7 @@
           </a:ln>
           <a:extLst>
             <a:ext uri="{C572A759-6A51-4108-AA02-DFA0A04FC94B}">
-              <ma14:wrappingTextBoxFlag xmlns="" xmlns:ma14="http://schemas.microsoft.com/office/mac/drawingml/2011/main" val="1"/>
+              <ma14:wrappingTextBoxFlag xmlns:ma14="http://schemas.microsoft.com/office/mac/drawingml/2011/main" xmlns="" val="1"/>
             </a:ext>
           </a:extLst>
         </p:spPr>
@@ -4898,7 +4904,7 @@
           </a:ln>
           <a:extLst>
             <a:ext uri="{C572A759-6A51-4108-AA02-DFA0A04FC94B}">
-              <ma14:wrappingTextBoxFlag xmlns="" xmlns:ma14="http://schemas.microsoft.com/office/mac/drawingml/2011/main" val="1"/>
+              <ma14:wrappingTextBoxFlag xmlns:ma14="http://schemas.microsoft.com/office/mac/drawingml/2011/main" xmlns="" val="1"/>
             </a:ext>
           </a:extLst>
         </p:spPr>
@@ -4968,7 +4974,7 @@
           </a:ln>
           <a:extLst>
             <a:ext uri="{C572A759-6A51-4108-AA02-DFA0A04FC94B}">
-              <ma14:wrappingTextBoxFlag xmlns="" xmlns:ma14="http://schemas.microsoft.com/office/mac/drawingml/2011/main" val="1"/>
+              <ma14:wrappingTextBoxFlag xmlns:ma14="http://schemas.microsoft.com/office/mac/drawingml/2011/main" xmlns="" val="1"/>
             </a:ext>
           </a:extLst>
         </p:spPr>
@@ -5229,7 +5235,7 @@
           </a:ln>
           <a:extLst>
             <a:ext uri="{C572A759-6A51-4108-AA02-DFA0A04FC94B}">
-              <ma14:wrappingTextBoxFlag xmlns="" xmlns:ma14="http://schemas.microsoft.com/office/mac/drawingml/2011/main" val="1"/>
+              <ma14:wrappingTextBoxFlag xmlns:ma14="http://schemas.microsoft.com/office/mac/drawingml/2011/main" xmlns="" val="1"/>
             </a:ext>
           </a:extLst>
         </p:spPr>
@@ -5481,7 +5487,7 @@
           </a:ln>
           <a:extLst>
             <a:ext uri="{C572A759-6A51-4108-AA02-DFA0A04FC94B}">
-              <ma14:wrappingTextBoxFlag xmlns="" xmlns:ma14="http://schemas.microsoft.com/office/mac/drawingml/2011/main" val="1"/>
+              <ma14:wrappingTextBoxFlag xmlns:ma14="http://schemas.microsoft.com/office/mac/drawingml/2011/main" xmlns="" val="1"/>
             </a:ext>
           </a:extLst>
         </p:spPr>
@@ -5698,7 +5704,7 @@
           </a:ln>
           <a:extLst>
             <a:ext uri="{C572A759-6A51-4108-AA02-DFA0A04FC94B}">
-              <ma14:wrappingTextBoxFlag xmlns="" xmlns:ma14="http://schemas.microsoft.com/office/mac/drawingml/2011/main" val="1"/>
+              <ma14:wrappingTextBoxFlag xmlns:ma14="http://schemas.microsoft.com/office/mac/drawingml/2011/main" xmlns="" val="1"/>
             </a:ext>
           </a:extLst>
         </p:spPr>
@@ -5768,7 +5774,7 @@
           </a:ln>
           <a:extLst>
             <a:ext uri="{C572A759-6A51-4108-AA02-DFA0A04FC94B}">
-              <ma14:wrappingTextBoxFlag xmlns="" xmlns:ma14="http://schemas.microsoft.com/office/mac/drawingml/2011/main" val="1"/>
+              <ma14:wrappingTextBoxFlag xmlns:ma14="http://schemas.microsoft.com/office/mac/drawingml/2011/main" xmlns="" val="1"/>
             </a:ext>
           </a:extLst>
         </p:spPr>
@@ -5840,7 +5846,7 @@
           </a:ln>
           <a:extLst>
             <a:ext uri="{C572A759-6A51-4108-AA02-DFA0A04FC94B}">
-              <ma14:wrappingTextBoxFlag xmlns="" xmlns:ma14="http://schemas.microsoft.com/office/mac/drawingml/2011/main" val="1"/>
+              <ma14:wrappingTextBoxFlag xmlns:ma14="http://schemas.microsoft.com/office/mac/drawingml/2011/main" xmlns="" val="1"/>
             </a:ext>
           </a:extLst>
         </p:spPr>
@@ -7707,6 +7713,342 @@
         </p:nvSpPr>
         <p:spPr>
           <a:xfrm>
+            <a:off x="389969" y="1299755"/>
+            <a:ext cx="11412063" cy="4258491"/>
+          </a:xfrm>
+          <a:prstGeom prst="rect">
+            <a:avLst/>
+          </a:prstGeom>
+          <a:pattFill prst="pct25">
+            <a:fgClr>
+              <a:srgbClr val="209CEE"/>
+            </a:fgClr>
+            <a:bgClr>
+              <a:schemeClr val="bg1"/>
+            </a:bgClr>
+          </a:pattFill>
+          <a:ln w="12700">
+            <a:noFill/>
+            <a:miter lim="400000"/>
+          </a:ln>
+          <a:extLst>
+            <a:ext uri="{C572A759-6A51-4108-AA02-DFA0A04FC94B}">
+              <ma14:wrappingTextBoxFlag xmlns:ma14="http://schemas.microsoft.com/office/mac/drawingml/2011/main" xmlns="" val="1"/>
+            </a:ext>
+          </a:extLst>
+        </p:spPr>
+        <p:txBody>
+          <a:bodyPr rtlCol="0" anchor="ctr"/>
+          <a:lstStyle/>
+          <a:p>
+            <a:pPr algn="ctr"/>
+            <a:endParaRPr kumimoji="1" lang="ja-JP" altLang="en-US"/>
+          </a:p>
+        </p:txBody>
+      </p:sp>
+      <p:pic>
+        <p:nvPicPr>
+          <p:cNvPr id="12" name="図 11">
+            <a:extLst>
+              <a:ext uri="{FF2B5EF4-FFF2-40B4-BE49-F238E27FC236}">
+                <a16:creationId xmlns:a16="http://schemas.microsoft.com/office/drawing/2014/main" id="{28AD7E83-8B6E-5DE0-E2D4-C239ACD4EBAB}"/>
+              </a:ext>
+            </a:extLst>
+          </p:cNvPr>
+          <p:cNvPicPr>
+            <a:picLocks noChangeAspect="1"/>
+          </p:cNvPicPr>
+          <p:nvPr/>
+        </p:nvPicPr>
+        <p:blipFill>
+          <a:blip r:embed="rId2">
+            <a:alphaModFix/>
+            <a:extLst>
+              <a:ext uri="{28A0092B-C50C-407E-A947-70E740481C1C}">
+                <a14:useLocalDpi xmlns:a14="http://schemas.microsoft.com/office/drawing/2010/main" val="0"/>
+              </a:ext>
+            </a:extLst>
+          </a:blip>
+          <a:stretch>
+            <a:fillRect/>
+          </a:stretch>
+        </p:blipFill>
+        <p:spPr>
+          <a:xfrm>
+            <a:off x="2209800" y="1379301"/>
+            <a:ext cx="7772400" cy="4099398"/>
+          </a:xfrm>
+          <a:prstGeom prst="rect">
+            <a:avLst/>
+          </a:prstGeom>
+        </p:spPr>
+      </p:pic>
+    </p:spTree>
+    <p:extLst>
+      <p:ext uri="{BB962C8B-B14F-4D97-AF65-F5344CB8AC3E}">
+        <p14:creationId xmlns:p14="http://schemas.microsoft.com/office/powerpoint/2010/main" val="1193483618"/>
+      </p:ext>
+    </p:extLst>
+  </p:cSld>
+  <p:clrMapOvr>
+    <a:masterClrMapping/>
+  </p:clrMapOvr>
+</p:sld>
+</file>
+
+<file path=ppt/slides/slide2.xml><?xml version="1.0" encoding="utf-8"?>
+<p:sld xmlns:a="http://schemas.openxmlformats.org/drawingml/2006/main" xmlns:r="http://schemas.openxmlformats.org/officeDocument/2006/relationships" xmlns:p="http://schemas.openxmlformats.org/presentationml/2006/main">
+  <p:cSld>
+    <p:spTree>
+      <p:nvGrpSpPr>
+        <p:cNvPr id="1" name=""/>
+        <p:cNvGrpSpPr/>
+        <p:nvPr/>
+      </p:nvGrpSpPr>
+      <p:grpSpPr>
+        <a:xfrm>
+          <a:off x="0" y="0"/>
+          <a:ext cx="0" cy="0"/>
+          <a:chOff x="0" y="0"/>
+          <a:chExt cx="0" cy="0"/>
+        </a:xfrm>
+      </p:grpSpPr>
+      <p:sp>
+        <p:nvSpPr>
+          <p:cNvPr id="3" name="正方形/長方形 2">
+            <a:extLst>
+              <a:ext uri="{FF2B5EF4-FFF2-40B4-BE49-F238E27FC236}">
+                <a16:creationId xmlns:a16="http://schemas.microsoft.com/office/drawing/2014/main" id="{CAC16E80-AFF4-F23C-8CC2-4461E00D795C}"/>
+              </a:ext>
+            </a:extLst>
+          </p:cNvPr>
+          <p:cNvSpPr/>
+          <p:nvPr/>
+        </p:nvSpPr>
+        <p:spPr>
+          <a:xfrm>
+            <a:off x="568181" y="1299754"/>
+            <a:ext cx="11055638" cy="4258491"/>
+          </a:xfrm>
+          <a:prstGeom prst="rect">
+            <a:avLst/>
+          </a:prstGeom>
+          <a:pattFill prst="pct25">
+            <a:fgClr>
+              <a:srgbClr val="209CEE"/>
+            </a:fgClr>
+            <a:bgClr>
+              <a:schemeClr val="bg1"/>
+            </a:bgClr>
+          </a:pattFill>
+          <a:ln w="12700">
+            <a:noFill/>
+            <a:miter lim="400000"/>
+          </a:ln>
+          <a:extLst>
+            <a:ext uri="{C572A759-6A51-4108-AA02-DFA0A04FC94B}">
+              <ma14:wrappingTextBoxFlag xmlns:ma14="http://schemas.microsoft.com/office/mac/drawingml/2011/main" xmlns="" val="1"/>
+            </a:ext>
+          </a:extLst>
+        </p:spPr>
+        <p:txBody>
+          <a:bodyPr rtlCol="0" anchor="ctr"/>
+          <a:lstStyle/>
+          <a:p>
+            <a:pPr algn="ctr"/>
+            <a:endParaRPr kumimoji="1" lang="ja-JP" altLang="en-US"/>
+          </a:p>
+        </p:txBody>
+      </p:sp>
+      <p:pic>
+        <p:nvPicPr>
+          <p:cNvPr id="12" name="図 11">
+            <a:extLst>
+              <a:ext uri="{FF2B5EF4-FFF2-40B4-BE49-F238E27FC236}">
+                <a16:creationId xmlns:a16="http://schemas.microsoft.com/office/drawing/2014/main" id="{28AD7E83-8B6E-5DE0-E2D4-C239ACD4EBAB}"/>
+              </a:ext>
+            </a:extLst>
+          </p:cNvPr>
+          <p:cNvPicPr>
+            <a:picLocks noChangeAspect="1"/>
+          </p:cNvPicPr>
+          <p:nvPr/>
+        </p:nvPicPr>
+        <p:blipFill>
+          <a:blip r:embed="rId2">
+            <a:alphaModFix/>
+            <a:extLst>
+              <a:ext uri="{28A0092B-C50C-407E-A947-70E740481C1C}">
+                <a14:useLocalDpi xmlns:a14="http://schemas.microsoft.com/office/drawing/2010/main" val="0"/>
+              </a:ext>
+            </a:extLst>
+          </a:blip>
+          <a:stretch>
+            <a:fillRect/>
+          </a:stretch>
+        </p:blipFill>
+        <p:spPr>
+          <a:xfrm>
+            <a:off x="2209800" y="1379301"/>
+            <a:ext cx="7772400" cy="4099398"/>
+          </a:xfrm>
+          <a:prstGeom prst="rect">
+            <a:avLst/>
+          </a:prstGeom>
+        </p:spPr>
+      </p:pic>
+    </p:spTree>
+    <p:extLst>
+      <p:ext uri="{BB962C8B-B14F-4D97-AF65-F5344CB8AC3E}">
+        <p14:creationId xmlns:p14="http://schemas.microsoft.com/office/powerpoint/2010/main" val="1170598070"/>
+      </p:ext>
+    </p:extLst>
+  </p:cSld>
+  <p:clrMapOvr>
+    <a:masterClrMapping/>
+  </p:clrMapOvr>
+</p:sld>
+</file>
+
+<file path=ppt/slides/slide3.xml><?xml version="1.0" encoding="utf-8"?>
+<p:sld xmlns:a="http://schemas.openxmlformats.org/drawingml/2006/main" xmlns:r="http://schemas.openxmlformats.org/officeDocument/2006/relationships" xmlns:p="http://schemas.openxmlformats.org/presentationml/2006/main">
+  <p:cSld>
+    <p:spTree>
+      <p:nvGrpSpPr>
+        <p:cNvPr id="1" name=""/>
+        <p:cNvGrpSpPr/>
+        <p:nvPr/>
+      </p:nvGrpSpPr>
+      <p:grpSpPr>
+        <a:xfrm>
+          <a:off x="0" y="0"/>
+          <a:ext cx="0" cy="0"/>
+          <a:chOff x="0" y="0"/>
+          <a:chExt cx="0" cy="0"/>
+        </a:xfrm>
+      </p:grpSpPr>
+      <p:sp>
+        <p:nvSpPr>
+          <p:cNvPr id="3" name="正方形/長方形 2">
+            <a:extLst>
+              <a:ext uri="{FF2B5EF4-FFF2-40B4-BE49-F238E27FC236}">
+                <a16:creationId xmlns:a16="http://schemas.microsoft.com/office/drawing/2014/main" id="{CAC16E80-AFF4-F23C-8CC2-4461E00D795C}"/>
+              </a:ext>
+            </a:extLst>
+          </p:cNvPr>
+          <p:cNvSpPr/>
+          <p:nvPr/>
+        </p:nvSpPr>
+        <p:spPr>
+          <a:xfrm>
+            <a:off x="568181" y="1299754"/>
+            <a:ext cx="11055638" cy="4258491"/>
+          </a:xfrm>
+          <a:prstGeom prst="rect">
+            <a:avLst/>
+          </a:prstGeom>
+          <a:solidFill>
+            <a:srgbClr val="209CEE"/>
+          </a:solidFill>
+          <a:ln w="12700">
+            <a:noFill/>
+            <a:miter lim="400000"/>
+          </a:ln>
+          <a:extLst>
+            <a:ext uri="{C572A759-6A51-4108-AA02-DFA0A04FC94B}">
+              <ma14:wrappingTextBoxFlag xmlns:ma14="http://schemas.microsoft.com/office/mac/drawingml/2011/main" xmlns="" val="1"/>
+            </a:ext>
+          </a:extLst>
+        </p:spPr>
+        <p:txBody>
+          <a:bodyPr rtlCol="0" anchor="ctr"/>
+          <a:lstStyle/>
+          <a:p>
+            <a:pPr algn="ctr"/>
+            <a:endParaRPr kumimoji="1" lang="ja-JP" altLang="en-US"/>
+          </a:p>
+        </p:txBody>
+      </p:sp>
+      <p:pic>
+        <p:nvPicPr>
+          <p:cNvPr id="12" name="図 11">
+            <a:extLst>
+              <a:ext uri="{FF2B5EF4-FFF2-40B4-BE49-F238E27FC236}">
+                <a16:creationId xmlns:a16="http://schemas.microsoft.com/office/drawing/2014/main" id="{28AD7E83-8B6E-5DE0-E2D4-C239ACD4EBAB}"/>
+              </a:ext>
+            </a:extLst>
+          </p:cNvPr>
+          <p:cNvPicPr>
+            <a:picLocks noChangeAspect="1"/>
+          </p:cNvPicPr>
+          <p:nvPr/>
+        </p:nvPicPr>
+        <p:blipFill>
+          <a:blip r:embed="rId2">
+            <a:extLst>
+              <a:ext uri="{28A0092B-C50C-407E-A947-70E740481C1C}">
+                <a14:useLocalDpi xmlns:a14="http://schemas.microsoft.com/office/drawing/2010/main" val="0"/>
+              </a:ext>
+            </a:extLst>
+          </a:blip>
+          <a:stretch>
+            <a:fillRect/>
+          </a:stretch>
+        </p:blipFill>
+        <p:spPr>
+          <a:xfrm>
+            <a:off x="2209800" y="1379301"/>
+            <a:ext cx="7772400" cy="4099398"/>
+          </a:xfrm>
+          <a:prstGeom prst="rect">
+            <a:avLst/>
+          </a:prstGeom>
+        </p:spPr>
+      </p:pic>
+    </p:spTree>
+    <p:extLst>
+      <p:ext uri="{BB962C8B-B14F-4D97-AF65-F5344CB8AC3E}">
+        <p14:creationId xmlns:p14="http://schemas.microsoft.com/office/powerpoint/2010/main" val="3475383372"/>
+      </p:ext>
+    </p:extLst>
+  </p:cSld>
+  <p:clrMapOvr>
+    <a:masterClrMapping/>
+  </p:clrMapOvr>
+</p:sld>
+</file>
+
+<file path=ppt/slides/slide4.xml><?xml version="1.0" encoding="utf-8"?>
+<p:sld xmlns:a="http://schemas.openxmlformats.org/drawingml/2006/main" xmlns:r="http://schemas.openxmlformats.org/officeDocument/2006/relationships" xmlns:p="http://schemas.openxmlformats.org/presentationml/2006/main">
+  <p:cSld>
+    <p:spTree>
+      <p:nvGrpSpPr>
+        <p:cNvPr id="1" name=""/>
+        <p:cNvGrpSpPr/>
+        <p:nvPr/>
+      </p:nvGrpSpPr>
+      <p:grpSpPr>
+        <a:xfrm>
+          <a:off x="0" y="0"/>
+          <a:ext cx="0" cy="0"/>
+          <a:chOff x="0" y="0"/>
+          <a:chExt cx="0" cy="0"/>
+        </a:xfrm>
+      </p:grpSpPr>
+      <p:sp>
+        <p:nvSpPr>
+          <p:cNvPr id="3" name="正方形/長方形 2">
+            <a:extLst>
+              <a:ext uri="{FF2B5EF4-FFF2-40B4-BE49-F238E27FC236}">
+                <a16:creationId xmlns:a16="http://schemas.microsoft.com/office/drawing/2014/main" id="{CAC16E80-AFF4-F23C-8CC2-4461E00D795C}"/>
+              </a:ext>
+            </a:extLst>
+          </p:cNvPr>
+          <p:cNvSpPr/>
+          <p:nvPr/>
+        </p:nvSpPr>
+        <p:spPr>
+          <a:xfrm>
             <a:off x="396664" y="34514"/>
             <a:ext cx="11055638" cy="1597490"/>
           </a:xfrm>
@@ -7727,7 +8069,7 @@
           </a:ln>
           <a:extLst>
             <a:ext uri="{C572A759-6A51-4108-AA02-DFA0A04FC94B}">
-              <ma14:wrappingTextBoxFlag xmlns="" xmlns:ma14="http://schemas.microsoft.com/office/mac/drawingml/2011/main" val="1"/>
+              <ma14:wrappingTextBoxFlag xmlns:ma14="http://schemas.microsoft.com/office/mac/drawingml/2011/main" xmlns="" val="1"/>
             </a:ext>
           </a:extLst>
         </p:spPr>
@@ -7772,7 +8114,7 @@
           </a:ln>
           <a:extLst>
             <a:ext uri="{C572A759-6A51-4108-AA02-DFA0A04FC94B}">
-              <ma14:wrappingTextBoxFlag xmlns="" xmlns:ma14="http://schemas.microsoft.com/office/mac/drawingml/2011/main" val="1"/>
+              <ma14:wrappingTextBoxFlag xmlns:ma14="http://schemas.microsoft.com/office/mac/drawingml/2011/main" xmlns="" val="1"/>
             </a:ext>
           </a:extLst>
         </p:spPr>
@@ -7847,7 +8189,7 @@
           </a:ln>
           <a:extLst>
             <a:ext uri="{C572A759-6A51-4108-AA02-DFA0A04FC94B}">
-              <ma14:wrappingTextBoxFlag xmlns="" xmlns:ma14="http://schemas.microsoft.com/office/mac/drawingml/2011/main" val="1"/>
+              <ma14:wrappingTextBoxFlag xmlns:ma14="http://schemas.microsoft.com/office/mac/drawingml/2011/main" xmlns="" val="1"/>
             </a:ext>
           </a:extLst>
         </p:spPr>
@@ -7938,7 +8280,7 @@
           </a:ln>
           <a:extLst>
             <a:ext uri="{C572A759-6A51-4108-AA02-DFA0A04FC94B}">
-              <ma14:wrappingTextBoxFlag xmlns="" xmlns:ma14="http://schemas.microsoft.com/office/mac/drawingml/2011/main" val="1"/>
+              <ma14:wrappingTextBoxFlag xmlns:ma14="http://schemas.microsoft.com/office/mac/drawingml/2011/main" xmlns="" val="1"/>
             </a:ext>
           </a:extLst>
         </p:spPr>
@@ -7983,7 +8325,7 @@
           </a:ln>
           <a:extLst>
             <a:ext uri="{C572A759-6A51-4108-AA02-DFA0A04FC94B}">
-              <ma14:wrappingTextBoxFlag xmlns="" xmlns:ma14="http://schemas.microsoft.com/office/mac/drawingml/2011/main" val="1"/>
+              <ma14:wrappingTextBoxFlag xmlns:ma14="http://schemas.microsoft.com/office/mac/drawingml/2011/main" xmlns="" val="1"/>
             </a:ext>
           </a:extLst>
         </p:spPr>
@@ -8058,7 +8400,7 @@
           </a:ln>
           <a:extLst>
             <a:ext uri="{C572A759-6A51-4108-AA02-DFA0A04FC94B}">
-              <ma14:wrappingTextBoxFlag xmlns="" xmlns:ma14="http://schemas.microsoft.com/office/mac/drawingml/2011/main" val="1"/>
+              <ma14:wrappingTextBoxFlag xmlns:ma14="http://schemas.microsoft.com/office/mac/drawingml/2011/main" xmlns="" val="1"/>
             </a:ext>
           </a:extLst>
         </p:spPr>
@@ -8149,7 +8491,7 @@
           </a:ln>
           <a:extLst>
             <a:ext uri="{C572A759-6A51-4108-AA02-DFA0A04FC94B}">
-              <ma14:wrappingTextBoxFlag xmlns="" xmlns:ma14="http://schemas.microsoft.com/office/mac/drawingml/2011/main" val="1"/>
+              <ma14:wrappingTextBoxFlag xmlns:ma14="http://schemas.microsoft.com/office/mac/drawingml/2011/main" xmlns="" val="1"/>
             </a:ext>
           </a:extLst>
         </p:spPr>
@@ -8194,7 +8536,7 @@
           </a:ln>
           <a:extLst>
             <a:ext uri="{C572A759-6A51-4108-AA02-DFA0A04FC94B}">
-              <ma14:wrappingTextBoxFlag xmlns="" xmlns:ma14="http://schemas.microsoft.com/office/mac/drawingml/2011/main" val="1"/>
+              <ma14:wrappingTextBoxFlag xmlns:ma14="http://schemas.microsoft.com/office/mac/drawingml/2011/main" xmlns="" val="1"/>
             </a:ext>
           </a:extLst>
         </p:spPr>
@@ -8273,7 +8615,7 @@
           </a:ln>
           <a:extLst>
             <a:ext uri="{C572A759-6A51-4108-AA02-DFA0A04FC94B}">
-              <ma14:wrappingTextBoxFlag xmlns="" xmlns:ma14="http://schemas.microsoft.com/office/mac/drawingml/2011/main" val="1"/>
+              <ma14:wrappingTextBoxFlag xmlns:ma14="http://schemas.microsoft.com/office/mac/drawingml/2011/main" xmlns="" val="1"/>
             </a:ext>
           </a:extLst>
         </p:spPr>
@@ -8327,10 +8669,46 @@
           </a:p>
         </p:txBody>
       </p:sp>
+      <p:pic>
+        <p:nvPicPr>
+          <p:cNvPr id="11" name="図 10">
+            <a:extLst>
+              <a:ext uri="{FF2B5EF4-FFF2-40B4-BE49-F238E27FC236}">
+                <a16:creationId xmlns:a16="http://schemas.microsoft.com/office/drawing/2014/main" id="{C6668C94-1541-6A45-9F76-B8EDDC8DEA6F}"/>
+              </a:ext>
+            </a:extLst>
+          </p:cNvPr>
+          <p:cNvPicPr>
+            <a:picLocks noChangeAspect="1"/>
+          </p:cNvPicPr>
+          <p:nvPr/>
+        </p:nvPicPr>
+        <p:blipFill>
+          <a:blip r:embed="rId2">
+            <a:extLst>
+              <a:ext uri="{28A0092B-C50C-407E-A947-70E740481C1C}">
+                <a14:useLocalDpi xmlns:a14="http://schemas.microsoft.com/office/drawing/2010/main" val="0"/>
+              </a:ext>
+            </a:extLst>
+          </a:blip>
+          <a:stretch>
+            <a:fillRect/>
+          </a:stretch>
+        </p:blipFill>
+        <p:spPr>
+          <a:xfrm>
+            <a:off x="8372619" y="3240314"/>
+            <a:ext cx="3251200" cy="3251200"/>
+          </a:xfrm>
+          <a:prstGeom prst="rect">
+            <a:avLst/>
+          </a:prstGeom>
+        </p:spPr>
+      </p:pic>
     </p:spTree>
     <p:extLst>
       <p:ext uri="{BB962C8B-B14F-4D97-AF65-F5344CB8AC3E}">
-        <p14:creationId xmlns:p14="http://schemas.microsoft.com/office/powerpoint/2010/main" val="1193483618"/>
+        <p14:creationId xmlns:p14="http://schemas.microsoft.com/office/powerpoint/2010/main" val="2478076632"/>
       </p:ext>
     </p:extLst>
   </p:cSld>
@@ -8574,7 +8952,7 @@
         </a:ln>
         <a:extLst>
           <a:ext uri="{C572A759-6A51-4108-AA02-DFA0A04FC94B}">
-            <ma14:wrappingTextBoxFlag xmlns:p="http://schemas.openxmlformats.org/presentationml/2006/main" xmlns:r="http://schemas.openxmlformats.org/officeDocument/2006/relationships" xmlns="" xmlns:ma14="http://schemas.microsoft.com/office/mac/drawingml/2011/main" val="1"/>
+            <ma14:wrappingTextBoxFlag xmlns:ma14="http://schemas.microsoft.com/office/mac/drawingml/2011/main" xmlns="" xmlns:r="http://schemas.openxmlformats.org/officeDocument/2006/relationships" xmlns:p="http://schemas.openxmlformats.org/presentationml/2006/main" val="1"/>
           </a:ext>
         </a:extLst>
       </a:spPr>
